--- a/ML-Assignment1-eamonfoy.pptx
+++ b/ML-Assignment1-eamonfoy.pptx
@@ -4,6 +4,9 @@
   <p:sldMasterIdLst>
     <p:sldMasterId id="2147483734" r:id="rId1"/>
   </p:sldMasterIdLst>
+  <p:notesMasterIdLst>
+    <p:notesMasterId r:id="rId5"/>
+  </p:notesMasterIdLst>
   <p:sldIdLst>
     <p:sldId id="261" r:id="rId2"/>
     <p:sldId id="262" r:id="rId3"/>
@@ -106,7 +109,1076 @@
       </a:defRPr>
     </a:lvl9pPr>
   </p:defaultTextStyle>
+  <p:extLst>
+    <p:ext uri="{EFAFB233-063F-42B5-8137-9DF3F51BA10A}">
+      <p15:sldGuideLst xmlns:p15="http://schemas.microsoft.com/office/powerpoint/2012/main"/>
+    </p:ext>
+  </p:extLst>
 </p:presentation>
+</file>
+
+<file path=ppt/notesMasters/notesMaster1.xml><?xml version="1.0" encoding="utf-8"?>
+<p:notesMaster xmlns:a="http://schemas.openxmlformats.org/drawingml/2006/main" xmlns:r="http://schemas.openxmlformats.org/officeDocument/2006/relationships" xmlns:p="http://schemas.openxmlformats.org/presentationml/2006/main">
+  <p:cSld>
+    <p:bg>
+      <p:bgRef idx="1001">
+        <a:schemeClr val="bg1"/>
+      </p:bgRef>
+    </p:bg>
+    <p:spTree>
+      <p:nvGrpSpPr>
+        <p:cNvPr id="1" name=""/>
+        <p:cNvGrpSpPr/>
+        <p:nvPr/>
+      </p:nvGrpSpPr>
+      <p:grpSpPr>
+        <a:xfrm>
+          <a:off x="0" y="0"/>
+          <a:ext cx="0" cy="0"/>
+          <a:chOff x="0" y="0"/>
+          <a:chExt cx="0" cy="0"/>
+        </a:xfrm>
+      </p:grpSpPr>
+      <p:sp>
+        <p:nvSpPr>
+          <p:cNvPr id="2" name="Header Placeholder 1"/>
+          <p:cNvSpPr>
+            <a:spLocks noGrp="1"/>
+          </p:cNvSpPr>
+          <p:nvPr>
+            <p:ph type="hdr" sz="quarter"/>
+          </p:nvPr>
+        </p:nvSpPr>
+        <p:spPr>
+          <a:xfrm>
+            <a:off x="0" y="0"/>
+            <a:ext cx="2971800" cy="458788"/>
+          </a:xfrm>
+          <a:prstGeom prst="rect">
+            <a:avLst/>
+          </a:prstGeom>
+        </p:spPr>
+        <p:txBody>
+          <a:bodyPr vert="horz" lIns="91440" tIns="45720" rIns="91440" bIns="45720" rtlCol="0"/>
+          <a:lstStyle>
+            <a:lvl1pPr algn="l">
+              <a:defRPr sz="1200"/>
+            </a:lvl1pPr>
+          </a:lstStyle>
+          <a:p>
+            <a:endParaRPr lang="en-US"/>
+          </a:p>
+        </p:txBody>
+      </p:sp>
+      <p:sp>
+        <p:nvSpPr>
+          <p:cNvPr id="3" name="Date Placeholder 2"/>
+          <p:cNvSpPr>
+            <a:spLocks noGrp="1"/>
+          </p:cNvSpPr>
+          <p:nvPr>
+            <p:ph type="dt" idx="1"/>
+          </p:nvPr>
+        </p:nvSpPr>
+        <p:spPr>
+          <a:xfrm>
+            <a:off x="3884613" y="0"/>
+            <a:ext cx="2971800" cy="458788"/>
+          </a:xfrm>
+          <a:prstGeom prst="rect">
+            <a:avLst/>
+          </a:prstGeom>
+        </p:spPr>
+        <p:txBody>
+          <a:bodyPr vert="horz" lIns="91440" tIns="45720" rIns="91440" bIns="45720" rtlCol="0"/>
+          <a:lstStyle>
+            <a:lvl1pPr algn="r">
+              <a:defRPr sz="1200"/>
+            </a:lvl1pPr>
+          </a:lstStyle>
+          <a:p>
+            <a:fld id="{3B654103-AD15-1A4E-A91E-1D6B05AB6202}" type="datetimeFigureOut">
+              <a:rPr lang="en-US" smtClean="0"/>
+              <a:t>4/29/26</a:t>
+            </a:fld>
+            <a:endParaRPr lang="en-US"/>
+          </a:p>
+        </p:txBody>
+      </p:sp>
+      <p:sp>
+        <p:nvSpPr>
+          <p:cNvPr id="4" name="Slide Image Placeholder 3"/>
+          <p:cNvSpPr>
+            <a:spLocks noGrp="1" noRot="1" noChangeAspect="1"/>
+          </p:cNvSpPr>
+          <p:nvPr>
+            <p:ph type="sldImg" idx="2"/>
+          </p:nvPr>
+        </p:nvSpPr>
+        <p:spPr>
+          <a:xfrm>
+            <a:off x="685800" y="1143000"/>
+            <a:ext cx="5486400" cy="3086100"/>
+          </a:xfrm>
+          <a:prstGeom prst="rect">
+            <a:avLst/>
+          </a:prstGeom>
+          <a:noFill/>
+          <a:ln w="12700">
+            <a:solidFill>
+              <a:prstClr val="black"/>
+            </a:solidFill>
+          </a:ln>
+        </p:spPr>
+        <p:txBody>
+          <a:bodyPr vert="horz" lIns="91440" tIns="45720" rIns="91440" bIns="45720" rtlCol="0" anchor="ctr"/>
+          <a:lstStyle/>
+          <a:p>
+            <a:endParaRPr lang="en-US"/>
+          </a:p>
+        </p:txBody>
+      </p:sp>
+      <p:sp>
+        <p:nvSpPr>
+          <p:cNvPr id="5" name="Notes Placeholder 4"/>
+          <p:cNvSpPr>
+            <a:spLocks noGrp="1"/>
+          </p:cNvSpPr>
+          <p:nvPr>
+            <p:ph type="body" sz="quarter" idx="3"/>
+          </p:nvPr>
+        </p:nvSpPr>
+        <p:spPr>
+          <a:xfrm>
+            <a:off x="685800" y="4400550"/>
+            <a:ext cx="5486400" cy="3600450"/>
+          </a:xfrm>
+          <a:prstGeom prst="rect">
+            <a:avLst/>
+          </a:prstGeom>
+        </p:spPr>
+        <p:txBody>
+          <a:bodyPr vert="horz" lIns="91440" tIns="45720" rIns="91440" bIns="45720" rtlCol="0"/>
+          <a:lstStyle/>
+          <a:p>
+            <a:pPr lvl="0"/>
+            <a:r>
+              <a:rPr lang="en-GB"/>
+              <a:t>Click to edit Master text styles</a:t>
+            </a:r>
+          </a:p>
+          <a:p>
+            <a:pPr lvl="1"/>
+            <a:r>
+              <a:rPr lang="en-GB"/>
+              <a:t>Second level</a:t>
+            </a:r>
+          </a:p>
+          <a:p>
+            <a:pPr lvl="2"/>
+            <a:r>
+              <a:rPr lang="en-GB"/>
+              <a:t>Third level</a:t>
+            </a:r>
+          </a:p>
+          <a:p>
+            <a:pPr lvl="3"/>
+            <a:r>
+              <a:rPr lang="en-GB"/>
+              <a:t>Fourth level</a:t>
+            </a:r>
+          </a:p>
+          <a:p>
+            <a:pPr lvl="4"/>
+            <a:r>
+              <a:rPr lang="en-GB"/>
+              <a:t>Fifth level</a:t>
+            </a:r>
+            <a:endParaRPr lang="en-US"/>
+          </a:p>
+        </p:txBody>
+      </p:sp>
+      <p:sp>
+        <p:nvSpPr>
+          <p:cNvPr id="6" name="Footer Placeholder 5"/>
+          <p:cNvSpPr>
+            <a:spLocks noGrp="1"/>
+          </p:cNvSpPr>
+          <p:nvPr>
+            <p:ph type="ftr" sz="quarter" idx="4"/>
+          </p:nvPr>
+        </p:nvSpPr>
+        <p:spPr>
+          <a:xfrm>
+            <a:off x="0" y="8685213"/>
+            <a:ext cx="2971800" cy="458787"/>
+          </a:xfrm>
+          <a:prstGeom prst="rect">
+            <a:avLst/>
+          </a:prstGeom>
+        </p:spPr>
+        <p:txBody>
+          <a:bodyPr vert="horz" lIns="91440" tIns="45720" rIns="91440" bIns="45720" rtlCol="0" anchor="b"/>
+          <a:lstStyle>
+            <a:lvl1pPr algn="l">
+              <a:defRPr sz="1200"/>
+            </a:lvl1pPr>
+          </a:lstStyle>
+          <a:p>
+            <a:endParaRPr lang="en-US"/>
+          </a:p>
+        </p:txBody>
+      </p:sp>
+      <p:sp>
+        <p:nvSpPr>
+          <p:cNvPr id="7" name="Slide Number Placeholder 6"/>
+          <p:cNvSpPr>
+            <a:spLocks noGrp="1"/>
+          </p:cNvSpPr>
+          <p:nvPr>
+            <p:ph type="sldNum" sz="quarter" idx="5"/>
+          </p:nvPr>
+        </p:nvSpPr>
+        <p:spPr>
+          <a:xfrm>
+            <a:off x="3884613" y="8685213"/>
+            <a:ext cx="2971800" cy="458787"/>
+          </a:xfrm>
+          <a:prstGeom prst="rect">
+            <a:avLst/>
+          </a:prstGeom>
+        </p:spPr>
+        <p:txBody>
+          <a:bodyPr vert="horz" lIns="91440" tIns="45720" rIns="91440" bIns="45720" rtlCol="0" anchor="b"/>
+          <a:lstStyle>
+            <a:lvl1pPr algn="r">
+              <a:defRPr sz="1200"/>
+            </a:lvl1pPr>
+          </a:lstStyle>
+          <a:p>
+            <a:fld id="{07F883B1-E8A6-4C4A-97E5-098F35C7FC1D}" type="slidenum">
+              <a:rPr lang="en-US" smtClean="0"/>
+              <a:t>‹#›</a:t>
+            </a:fld>
+            <a:endParaRPr lang="en-US"/>
+          </a:p>
+        </p:txBody>
+      </p:sp>
+    </p:spTree>
+    <p:extLst>
+      <p:ext uri="{BB962C8B-B14F-4D97-AF65-F5344CB8AC3E}">
+        <p14:creationId xmlns:p14="http://schemas.microsoft.com/office/powerpoint/2010/main" val="1202804596"/>
+      </p:ext>
+    </p:extLst>
+  </p:cSld>
+  <p:clrMap bg1="lt1" tx1="dk1" bg2="lt2" tx2="dk2" accent1="accent1" accent2="accent2" accent3="accent3" accent4="accent4" accent5="accent5" accent6="accent6" hlink="hlink" folHlink="folHlink"/>
+  <p:notesStyle>
+    <a:lvl1pPr marL="0" algn="l" defTabSz="914400" rtl="0" eaLnBrk="1" latinLnBrk="0" hangingPunct="1">
+      <a:defRPr sz="1200" kern="1200">
+        <a:solidFill>
+          <a:schemeClr val="tx1"/>
+        </a:solidFill>
+        <a:latin typeface="+mn-lt"/>
+        <a:ea typeface="+mn-ea"/>
+        <a:cs typeface="+mn-cs"/>
+      </a:defRPr>
+    </a:lvl1pPr>
+    <a:lvl2pPr marL="457200" algn="l" defTabSz="914400" rtl="0" eaLnBrk="1" latinLnBrk="0" hangingPunct="1">
+      <a:defRPr sz="1200" kern="1200">
+        <a:solidFill>
+          <a:schemeClr val="tx1"/>
+        </a:solidFill>
+        <a:latin typeface="+mn-lt"/>
+        <a:ea typeface="+mn-ea"/>
+        <a:cs typeface="+mn-cs"/>
+      </a:defRPr>
+    </a:lvl2pPr>
+    <a:lvl3pPr marL="914400" algn="l" defTabSz="914400" rtl="0" eaLnBrk="1" latinLnBrk="0" hangingPunct="1">
+      <a:defRPr sz="1200" kern="1200">
+        <a:solidFill>
+          <a:schemeClr val="tx1"/>
+        </a:solidFill>
+        <a:latin typeface="+mn-lt"/>
+        <a:ea typeface="+mn-ea"/>
+        <a:cs typeface="+mn-cs"/>
+      </a:defRPr>
+    </a:lvl3pPr>
+    <a:lvl4pPr marL="1371600" algn="l" defTabSz="914400" rtl="0" eaLnBrk="1" latinLnBrk="0" hangingPunct="1">
+      <a:defRPr sz="1200" kern="1200">
+        <a:solidFill>
+          <a:schemeClr val="tx1"/>
+        </a:solidFill>
+        <a:latin typeface="+mn-lt"/>
+        <a:ea typeface="+mn-ea"/>
+        <a:cs typeface="+mn-cs"/>
+      </a:defRPr>
+    </a:lvl4pPr>
+    <a:lvl5pPr marL="1828800" algn="l" defTabSz="914400" rtl="0" eaLnBrk="1" latinLnBrk="0" hangingPunct="1">
+      <a:defRPr sz="1200" kern="1200">
+        <a:solidFill>
+          <a:schemeClr val="tx1"/>
+        </a:solidFill>
+        <a:latin typeface="+mn-lt"/>
+        <a:ea typeface="+mn-ea"/>
+        <a:cs typeface="+mn-cs"/>
+      </a:defRPr>
+    </a:lvl5pPr>
+    <a:lvl6pPr marL="2286000" algn="l" defTabSz="914400" rtl="0" eaLnBrk="1" latinLnBrk="0" hangingPunct="1">
+      <a:defRPr sz="1200" kern="1200">
+        <a:solidFill>
+          <a:schemeClr val="tx1"/>
+        </a:solidFill>
+        <a:latin typeface="+mn-lt"/>
+        <a:ea typeface="+mn-ea"/>
+        <a:cs typeface="+mn-cs"/>
+      </a:defRPr>
+    </a:lvl6pPr>
+    <a:lvl7pPr marL="2743200" algn="l" defTabSz="914400" rtl="0" eaLnBrk="1" latinLnBrk="0" hangingPunct="1">
+      <a:defRPr sz="1200" kern="1200">
+        <a:solidFill>
+          <a:schemeClr val="tx1"/>
+        </a:solidFill>
+        <a:latin typeface="+mn-lt"/>
+        <a:ea typeface="+mn-ea"/>
+        <a:cs typeface="+mn-cs"/>
+      </a:defRPr>
+    </a:lvl7pPr>
+    <a:lvl8pPr marL="3200400" algn="l" defTabSz="914400" rtl="0" eaLnBrk="1" latinLnBrk="0" hangingPunct="1">
+      <a:defRPr sz="1200" kern="1200">
+        <a:solidFill>
+          <a:schemeClr val="tx1"/>
+        </a:solidFill>
+        <a:latin typeface="+mn-lt"/>
+        <a:ea typeface="+mn-ea"/>
+        <a:cs typeface="+mn-cs"/>
+      </a:defRPr>
+    </a:lvl8pPr>
+    <a:lvl9pPr marL="3657600" algn="l" defTabSz="914400" rtl="0" eaLnBrk="1" latinLnBrk="0" hangingPunct="1">
+      <a:defRPr sz="1200" kern="1200">
+        <a:solidFill>
+          <a:schemeClr val="tx1"/>
+        </a:solidFill>
+        <a:latin typeface="+mn-lt"/>
+        <a:ea typeface="+mn-ea"/>
+        <a:cs typeface="+mn-cs"/>
+      </a:defRPr>
+    </a:lvl9pPr>
+  </p:notesStyle>
+</p:notesMaster>
+</file>
+
+<file path=ppt/notesSlides/notesSlide1.xml><?xml version="1.0" encoding="utf-8"?>
+<p:notes xmlns:a="http://schemas.openxmlformats.org/drawingml/2006/main" xmlns:r="http://schemas.openxmlformats.org/officeDocument/2006/relationships" xmlns:p="http://schemas.openxmlformats.org/presentationml/2006/main">
+  <p:cSld>
+    <p:spTree>
+      <p:nvGrpSpPr>
+        <p:cNvPr id="1" name=""/>
+        <p:cNvGrpSpPr/>
+        <p:nvPr/>
+      </p:nvGrpSpPr>
+      <p:grpSpPr>
+        <a:xfrm>
+          <a:off x="0" y="0"/>
+          <a:ext cx="0" cy="0"/>
+          <a:chOff x="0" y="0"/>
+          <a:chExt cx="0" cy="0"/>
+        </a:xfrm>
+      </p:grpSpPr>
+      <p:sp>
+        <p:nvSpPr>
+          <p:cNvPr id="2" name="Slide Image Placeholder 1"/>
+          <p:cNvSpPr>
+            <a:spLocks noGrp="1" noRot="1" noChangeAspect="1"/>
+          </p:cNvSpPr>
+          <p:nvPr>
+            <p:ph type="sldImg"/>
+          </p:nvPr>
+        </p:nvSpPr>
+        <p:spPr/>
+      </p:sp>
+      <p:sp>
+        <p:nvSpPr>
+          <p:cNvPr id="3" name="Notes Placeholder 2"/>
+          <p:cNvSpPr>
+            <a:spLocks noGrp="1"/>
+          </p:cNvSpPr>
+          <p:nvPr>
+            <p:ph type="body" idx="1"/>
+          </p:nvPr>
+        </p:nvSpPr>
+        <p:spPr/>
+        <p:txBody>
+          <a:bodyPr/>
+          <a:lstStyle/>
+          <a:p>
+            <a:r>
+              <a:rPr lang="en-IE" sz="1200" b="0" i="0" kern="1200" dirty="0">
+                <a:solidFill>
+                  <a:schemeClr val="tx1"/>
+                </a:solidFill>
+                <a:effectLst/>
+                <a:latin typeface="+mn-lt"/>
+                <a:ea typeface="+mn-ea"/>
+                <a:cs typeface="+mn-cs"/>
+              </a:rPr>
+              <a:t>This presentation reviews how machine learning is used in the information war, focusing on what it can do well and where it struggles.</a:t>
+            </a:r>
+          </a:p>
+          <a:p>
+            <a:r>
+              <a:rPr lang="en-IE" sz="1200" b="0" i="0" kern="1200" dirty="0">
+                <a:solidFill>
+                  <a:schemeClr val="tx1"/>
+                </a:solidFill>
+                <a:effectLst/>
+                <a:latin typeface="+mn-lt"/>
+                <a:ea typeface="+mn-ea"/>
+                <a:cs typeface="+mn-cs"/>
+              </a:rPr>
+              <a:t>Information warfare is about influencing what people believe and how they behave, usually for political or strategic reasons. It is not just about fake content. It is a </a:t>
+            </a:r>
+            <a:r>
+              <a:rPr lang="en-IE" sz="1200" b="1" i="0" kern="1200" dirty="0">
+                <a:solidFill>
+                  <a:schemeClr val="tx1"/>
+                </a:solidFill>
+                <a:effectLst/>
+                <a:latin typeface="+mn-lt"/>
+                <a:ea typeface="+mn-ea"/>
+                <a:cs typeface="+mn-cs"/>
+              </a:rPr>
+              <a:t>system</a:t>
+            </a:r>
+            <a:r>
+              <a:rPr lang="en-IE" sz="1200" b="0" i="0" kern="1200" dirty="0">
+                <a:solidFill>
+                  <a:schemeClr val="tx1"/>
+                </a:solidFill>
+                <a:effectLst/>
+                <a:latin typeface="+mn-lt"/>
+                <a:ea typeface="+mn-ea"/>
+                <a:cs typeface="+mn-cs"/>
+              </a:rPr>
+              <a:t> involving attackers, social media platforms, automated accounts, and real users, all interacting with each other.</a:t>
+            </a:r>
+          </a:p>
+          <a:p>
+            <a:r>
+              <a:rPr lang="en-IE" sz="1200" b="0" i="0" kern="1200" dirty="0">
+                <a:solidFill>
+                  <a:schemeClr val="tx1"/>
+                </a:solidFill>
+                <a:effectLst/>
+                <a:latin typeface="+mn-lt"/>
+                <a:ea typeface="+mn-ea"/>
+                <a:cs typeface="+mn-cs"/>
+              </a:rPr>
+              <a:t>Machine learning is used in several ways here. Models are trained to classify content, for example to detect misleading or machine-generated text. Graph and network methods look for coordinated behaviour across accounts. Representation learning helps models understand meaning and patterns in content. There is also growing interest in using reinforcement learning to optimise how influence campaigns are run over time.</a:t>
+            </a:r>
+          </a:p>
+          <a:p>
+            <a:r>
+              <a:rPr lang="en-IE" sz="1200" b="0" i="0" kern="1200" dirty="0">
+                <a:solidFill>
+                  <a:schemeClr val="tx1"/>
+                </a:solidFill>
+                <a:effectLst/>
+                <a:latin typeface="+mn-lt"/>
+                <a:ea typeface="+mn-ea"/>
+                <a:cs typeface="+mn-cs"/>
+              </a:rPr>
+              <a:t>The key issue is that this is an </a:t>
+            </a:r>
+            <a:r>
+              <a:rPr lang="en-IE" sz="1200" b="1" i="0" kern="1200" dirty="0">
+                <a:solidFill>
+                  <a:schemeClr val="tx1"/>
+                </a:solidFill>
+                <a:effectLst/>
+                <a:latin typeface="+mn-lt"/>
+                <a:ea typeface="+mn-ea"/>
+                <a:cs typeface="+mn-cs"/>
+              </a:rPr>
+              <a:t>adversarial environment</a:t>
+            </a:r>
+            <a:r>
+              <a:rPr lang="en-IE" sz="1200" b="0" i="0" kern="1200" dirty="0">
+                <a:solidFill>
+                  <a:schemeClr val="tx1"/>
+                </a:solidFill>
+                <a:effectLst/>
+                <a:latin typeface="+mn-lt"/>
+                <a:ea typeface="+mn-ea"/>
+                <a:cs typeface="+mn-cs"/>
+              </a:rPr>
+              <a:t>. Attackers are constantly changing how they operate to avoid being detected. Because of this, models trained on past data often fail when they meet new patterns. This is known as </a:t>
+            </a:r>
+            <a:r>
+              <a:rPr lang="en-IE" sz="1200" b="1" i="0" kern="1200" dirty="0">
+                <a:solidFill>
+                  <a:schemeClr val="tx1"/>
+                </a:solidFill>
+                <a:effectLst/>
+                <a:latin typeface="+mn-lt"/>
+                <a:ea typeface="+mn-ea"/>
+                <a:cs typeface="+mn-cs"/>
+              </a:rPr>
+              <a:t>domain shift</a:t>
+            </a:r>
+            <a:r>
+              <a:rPr lang="en-IE" sz="1200" b="0" i="0" kern="1200" dirty="0">
+                <a:solidFill>
+                  <a:schemeClr val="tx1"/>
+                </a:solidFill>
+                <a:effectLst/>
+                <a:latin typeface="+mn-lt"/>
+                <a:ea typeface="+mn-ea"/>
+                <a:cs typeface="+mn-cs"/>
+              </a:rPr>
+              <a:t>.</a:t>
+            </a:r>
+          </a:p>
+          <a:p>
+            <a:r>
+              <a:rPr lang="en-IE" sz="1200" b="0" i="0" kern="1200" dirty="0">
+                <a:solidFill>
+                  <a:schemeClr val="tx1"/>
+                </a:solidFill>
+                <a:effectLst/>
+                <a:latin typeface="+mn-lt"/>
+                <a:ea typeface="+mn-ea"/>
+                <a:cs typeface="+mn-cs"/>
+              </a:rPr>
+              <a:t>This creates a problem for defenders. A model might perform well in testing, but that does not guarantee it will work in the real world. So the key question is not just whether machine learning can detect disinformation, but whether it can stay effective as attackers adapt.</a:t>
+            </a:r>
+          </a:p>
+          <a:p>
+            <a:endParaRPr lang="en-US" dirty="0"/>
+          </a:p>
+        </p:txBody>
+      </p:sp>
+      <p:sp>
+        <p:nvSpPr>
+          <p:cNvPr id="4" name="Slide Number Placeholder 3"/>
+          <p:cNvSpPr>
+            <a:spLocks noGrp="1"/>
+          </p:cNvSpPr>
+          <p:nvPr>
+            <p:ph type="sldNum" sz="quarter" idx="5"/>
+          </p:nvPr>
+        </p:nvSpPr>
+        <p:spPr/>
+        <p:txBody>
+          <a:bodyPr/>
+          <a:lstStyle/>
+          <a:p>
+            <a:fld id="{07F883B1-E8A6-4C4A-97E5-098F35C7FC1D}" type="slidenum">
+              <a:rPr lang="en-US" smtClean="0"/>
+              <a:t>1</a:t>
+            </a:fld>
+            <a:endParaRPr lang="en-US"/>
+          </a:p>
+        </p:txBody>
+      </p:sp>
+    </p:spTree>
+    <p:extLst>
+      <p:ext uri="{BB962C8B-B14F-4D97-AF65-F5344CB8AC3E}">
+        <p14:creationId xmlns:p14="http://schemas.microsoft.com/office/powerpoint/2010/main" val="568499055"/>
+      </p:ext>
+    </p:extLst>
+  </p:cSld>
+  <p:clrMapOvr>
+    <a:masterClrMapping/>
+  </p:clrMapOvr>
+</p:notes>
+</file>
+
+<file path=ppt/notesSlides/notesSlide2.xml><?xml version="1.0" encoding="utf-8"?>
+<p:notes xmlns:a="http://schemas.openxmlformats.org/drawingml/2006/main" xmlns:r="http://schemas.openxmlformats.org/officeDocument/2006/relationships" xmlns:p="http://schemas.openxmlformats.org/presentationml/2006/main">
+  <p:cSld>
+    <p:spTree>
+      <p:nvGrpSpPr>
+        <p:cNvPr id="1" name=""/>
+        <p:cNvGrpSpPr/>
+        <p:nvPr/>
+      </p:nvGrpSpPr>
+      <p:grpSpPr>
+        <a:xfrm>
+          <a:off x="0" y="0"/>
+          <a:ext cx="0" cy="0"/>
+          <a:chOff x="0" y="0"/>
+          <a:chExt cx="0" cy="0"/>
+        </a:xfrm>
+      </p:grpSpPr>
+      <p:sp>
+        <p:nvSpPr>
+          <p:cNvPr id="2" name="Slide Image Placeholder 1"/>
+          <p:cNvSpPr>
+            <a:spLocks noGrp="1" noRot="1" noChangeAspect="1"/>
+          </p:cNvSpPr>
+          <p:nvPr>
+            <p:ph type="sldImg"/>
+          </p:nvPr>
+        </p:nvSpPr>
+        <p:spPr/>
+      </p:sp>
+      <p:sp>
+        <p:nvSpPr>
+          <p:cNvPr id="3" name="Notes Placeholder 2"/>
+          <p:cNvSpPr>
+            <a:spLocks noGrp="1"/>
+          </p:cNvSpPr>
+          <p:nvPr>
+            <p:ph type="body" idx="1"/>
+          </p:nvPr>
+        </p:nvSpPr>
+        <p:spPr/>
+        <p:txBody>
+          <a:bodyPr/>
+          <a:lstStyle/>
+          <a:p>
+            <a:r>
+              <a:rPr lang="en-IE" sz="1200" b="0" i="0" kern="1200" dirty="0">
+                <a:solidFill>
+                  <a:schemeClr val="tx1"/>
+                </a:solidFill>
+                <a:effectLst/>
+                <a:latin typeface="+mn-lt"/>
+                <a:ea typeface="+mn-ea"/>
+                <a:cs typeface="+mn-cs"/>
+              </a:rPr>
+              <a:t>There are several machine learning approaches used to detect information warfare activity, and research shows they can work well in controlled settings.</a:t>
+            </a:r>
+          </a:p>
+          <a:p>
+            <a:r>
+              <a:rPr lang="en-IE" sz="1200" b="0" i="0" kern="1200" dirty="0">
+                <a:solidFill>
+                  <a:schemeClr val="tx1"/>
+                </a:solidFill>
+                <a:effectLst/>
+                <a:latin typeface="+mn-lt"/>
+                <a:ea typeface="+mn-ea"/>
+                <a:cs typeface="+mn-cs"/>
+              </a:rPr>
+              <a:t>For example, deep learning models can detect machine-generated text by learning patterns in language. One study shows that models using </a:t>
+            </a:r>
+            <a:r>
+              <a:rPr lang="en-IE" sz="1200" b="0" i="0" kern="1200" dirty="0" err="1">
+                <a:solidFill>
+                  <a:schemeClr val="tx1"/>
+                </a:solidFill>
+                <a:effectLst/>
+                <a:latin typeface="+mn-lt"/>
+                <a:ea typeface="+mn-ea"/>
+                <a:cs typeface="+mn-cs"/>
+              </a:rPr>
+              <a:t>FastText</a:t>
+            </a:r>
+            <a:r>
+              <a:rPr lang="en-IE" sz="1200" b="0" i="0" kern="1200" dirty="0">
+                <a:solidFill>
+                  <a:schemeClr val="tx1"/>
+                </a:solidFill>
+                <a:effectLst/>
+                <a:latin typeface="+mn-lt"/>
+                <a:ea typeface="+mn-ea"/>
+                <a:cs typeface="+mn-cs"/>
+              </a:rPr>
+              <a:t> embeddings can accurately classify generated tweets. These models pick up subtle patterns that are hard for humans to see.</a:t>
+            </a:r>
+          </a:p>
+          <a:p>
+            <a:r>
+              <a:rPr lang="en-IE" sz="1200" b="0" i="0" kern="1200" dirty="0">
+                <a:solidFill>
+                  <a:schemeClr val="tx1"/>
+                </a:solidFill>
+                <a:effectLst/>
+                <a:latin typeface="+mn-lt"/>
+                <a:ea typeface="+mn-ea"/>
+                <a:cs typeface="+mn-cs"/>
+              </a:rPr>
+              <a:t>However, these systems often struggle in real-world conditions. When attackers change how they write, for example by rephrasing or using new tools, the model may no longer recognise the pattern. This is a clear example of domain shift.</a:t>
+            </a:r>
+          </a:p>
+          <a:p>
+            <a:r>
+              <a:rPr lang="en-IE" sz="1200" b="0" i="0" kern="1200" dirty="0">
+                <a:solidFill>
+                  <a:schemeClr val="tx1"/>
+                </a:solidFill>
+                <a:effectLst/>
+                <a:latin typeface="+mn-lt"/>
+                <a:ea typeface="+mn-ea"/>
+                <a:cs typeface="+mn-cs"/>
+              </a:rPr>
+              <a:t>To improve this, some methods focus on behaviour rather than content. Graph-based models look at how accounts interact, such as timing, connections, and coordination. These are often harder to fake than text alone, so they can be more robust.</a:t>
+            </a:r>
+          </a:p>
+          <a:p>
+            <a:r>
+              <a:rPr lang="en-IE" sz="1200" b="0" i="0" kern="1200" dirty="0">
+                <a:solidFill>
+                  <a:schemeClr val="tx1"/>
+                </a:solidFill>
+                <a:effectLst/>
+                <a:latin typeface="+mn-lt"/>
+                <a:ea typeface="+mn-ea"/>
+                <a:cs typeface="+mn-cs"/>
+              </a:rPr>
+              <a:t>But they are not perfect either. Attackers can spread activity over longer periods or across different platforms, making detection harder.</a:t>
+            </a:r>
+          </a:p>
+          <a:p>
+            <a:r>
+              <a:rPr lang="en-IE" sz="1200" b="0" i="0" kern="1200" dirty="0">
+                <a:solidFill>
+                  <a:schemeClr val="tx1"/>
+                </a:solidFill>
+                <a:effectLst/>
+                <a:latin typeface="+mn-lt"/>
+                <a:ea typeface="+mn-ea"/>
+                <a:cs typeface="+mn-cs"/>
+              </a:rPr>
+              <a:t>For deepfakes, machine learning models can detect visual or audio artefacts, but this is constantly evolving. As generation tools improve, detection becomes more difficult.</a:t>
+            </a:r>
+          </a:p>
+          <a:p>
+            <a:r>
+              <a:rPr lang="en-IE" sz="1200" b="0" i="0" kern="1200" dirty="0">
+                <a:solidFill>
+                  <a:schemeClr val="tx1"/>
+                </a:solidFill>
+                <a:effectLst/>
+                <a:latin typeface="+mn-lt"/>
+                <a:ea typeface="+mn-ea"/>
+                <a:cs typeface="+mn-cs"/>
+              </a:rPr>
+              <a:t>In practice, organisations combine multiple methods into a single system. These systems usually support human analysts by highlighting suspicious activity rather than making final decisions.</a:t>
+            </a:r>
+          </a:p>
+          <a:p>
+            <a:r>
+              <a:rPr lang="en-IE" sz="1200" b="0" i="0" kern="1200" dirty="0">
+                <a:solidFill>
+                  <a:schemeClr val="tx1"/>
+                </a:solidFill>
+                <a:effectLst/>
+                <a:latin typeface="+mn-lt"/>
+                <a:ea typeface="+mn-ea"/>
+                <a:cs typeface="+mn-cs"/>
+              </a:rPr>
+              <a:t>This leads to an important point: </a:t>
+            </a:r>
+            <a:r>
+              <a:rPr lang="en-IE" sz="1200" b="1" i="0" kern="1200" dirty="0">
+                <a:solidFill>
+                  <a:schemeClr val="tx1"/>
+                </a:solidFill>
+                <a:effectLst/>
+                <a:latin typeface="+mn-lt"/>
+                <a:ea typeface="+mn-ea"/>
+                <a:cs typeface="+mn-cs"/>
+              </a:rPr>
+              <a:t>high accuracy in testing does not mean the system will work well in the real world</a:t>
+            </a:r>
+            <a:r>
+              <a:rPr lang="en-IE" sz="1200" b="0" i="0" kern="1200" dirty="0">
+                <a:solidFill>
+                  <a:schemeClr val="tx1"/>
+                </a:solidFill>
+                <a:effectLst/>
+                <a:latin typeface="+mn-lt"/>
+                <a:ea typeface="+mn-ea"/>
+                <a:cs typeface="+mn-cs"/>
+              </a:rPr>
+              <a:t>. Proper evaluation needs to consider how models perform over time, on new types of data, and under deliberate evasion.</a:t>
+            </a:r>
+          </a:p>
+          <a:p>
+            <a:endParaRPr lang="en-US" dirty="0"/>
+          </a:p>
+        </p:txBody>
+      </p:sp>
+      <p:sp>
+        <p:nvSpPr>
+          <p:cNvPr id="4" name="Slide Number Placeholder 3"/>
+          <p:cNvSpPr>
+            <a:spLocks noGrp="1"/>
+          </p:cNvSpPr>
+          <p:nvPr>
+            <p:ph type="sldNum" sz="quarter" idx="5"/>
+          </p:nvPr>
+        </p:nvSpPr>
+        <p:spPr/>
+        <p:txBody>
+          <a:bodyPr/>
+          <a:lstStyle/>
+          <a:p>
+            <a:fld id="{07F883B1-E8A6-4C4A-97E5-098F35C7FC1D}" type="slidenum">
+              <a:rPr lang="en-US" smtClean="0"/>
+              <a:t>2</a:t>
+            </a:fld>
+            <a:endParaRPr lang="en-US"/>
+          </a:p>
+        </p:txBody>
+      </p:sp>
+    </p:spTree>
+    <p:extLst>
+      <p:ext uri="{BB962C8B-B14F-4D97-AF65-F5344CB8AC3E}">
+        <p14:creationId xmlns:p14="http://schemas.microsoft.com/office/powerpoint/2010/main" val="2384519653"/>
+      </p:ext>
+    </p:extLst>
+  </p:cSld>
+  <p:clrMapOvr>
+    <a:masterClrMapping/>
+  </p:clrMapOvr>
+</p:notes>
+</file>
+
+<file path=ppt/notesSlides/notesSlide3.xml><?xml version="1.0" encoding="utf-8"?>
+<p:notes xmlns:a="http://schemas.openxmlformats.org/drawingml/2006/main" xmlns:r="http://schemas.openxmlformats.org/officeDocument/2006/relationships" xmlns:p="http://schemas.openxmlformats.org/presentationml/2006/main">
+  <p:cSld>
+    <p:spTree>
+      <p:nvGrpSpPr>
+        <p:cNvPr id="1" name=""/>
+        <p:cNvGrpSpPr/>
+        <p:nvPr/>
+      </p:nvGrpSpPr>
+      <p:grpSpPr>
+        <a:xfrm>
+          <a:off x="0" y="0"/>
+          <a:ext cx="0" cy="0"/>
+          <a:chOff x="0" y="0"/>
+          <a:chExt cx="0" cy="0"/>
+        </a:xfrm>
+      </p:grpSpPr>
+      <p:sp>
+        <p:nvSpPr>
+          <p:cNvPr id="2" name="Slide Image Placeholder 1"/>
+          <p:cNvSpPr>
+            <a:spLocks noGrp="1" noRot="1" noChangeAspect="1"/>
+          </p:cNvSpPr>
+          <p:nvPr>
+            <p:ph type="sldImg"/>
+          </p:nvPr>
+        </p:nvSpPr>
+        <p:spPr/>
+      </p:sp>
+      <p:sp>
+        <p:nvSpPr>
+          <p:cNvPr id="3" name="Notes Placeholder 2"/>
+          <p:cNvSpPr>
+            <a:spLocks noGrp="1"/>
+          </p:cNvSpPr>
+          <p:nvPr>
+            <p:ph type="body" idx="1"/>
+          </p:nvPr>
+        </p:nvSpPr>
+        <p:spPr/>
+        <p:txBody>
+          <a:bodyPr/>
+          <a:lstStyle/>
+          <a:p>
+            <a:r>
+              <a:rPr lang="en-IE" sz="1200" b="0" i="0" kern="1200" dirty="0">
+                <a:solidFill>
+                  <a:schemeClr val="tx1"/>
+                </a:solidFill>
+                <a:effectLst/>
+                <a:latin typeface="+mn-lt"/>
+                <a:ea typeface="+mn-ea"/>
+                <a:cs typeface="+mn-cs"/>
+              </a:rPr>
+              <a:t>A major challenge in this field is adversarial machine learning. This means attackers are not just using machine learning, they are also trying to break it.</a:t>
+            </a:r>
+          </a:p>
+          <a:p>
+            <a:r>
+              <a:rPr lang="en-IE" sz="1200" b="0" i="0" kern="1200" dirty="0">
+                <a:solidFill>
+                  <a:schemeClr val="tx1"/>
+                </a:solidFill>
+                <a:effectLst/>
+                <a:latin typeface="+mn-lt"/>
+                <a:ea typeface="+mn-ea"/>
+                <a:cs typeface="+mn-cs"/>
+              </a:rPr>
+              <a:t>One way they do this is through </a:t>
+            </a:r>
+            <a:r>
+              <a:rPr lang="en-IE" sz="1200" b="1" i="0" kern="1200" dirty="0">
+                <a:solidFill>
+                  <a:schemeClr val="tx1"/>
+                </a:solidFill>
+                <a:effectLst/>
+                <a:latin typeface="+mn-lt"/>
+                <a:ea typeface="+mn-ea"/>
+                <a:cs typeface="+mn-cs"/>
+              </a:rPr>
+              <a:t>data poisoning</a:t>
+            </a:r>
+            <a:r>
+              <a:rPr lang="en-IE" sz="1200" b="0" i="0" kern="1200" dirty="0">
+                <a:solidFill>
+                  <a:schemeClr val="tx1"/>
+                </a:solidFill>
+                <a:effectLst/>
+                <a:latin typeface="+mn-lt"/>
+                <a:ea typeface="+mn-ea"/>
+                <a:cs typeface="+mn-cs"/>
+              </a:rPr>
+              <a:t>, where they try to influence the data used to train or update models. For example, they might generate fake engagement or manipulate reporting systems.</a:t>
+            </a:r>
+          </a:p>
+          <a:p>
+            <a:r>
+              <a:rPr lang="en-IE" sz="1200" b="0" i="0" kern="1200" dirty="0">
+                <a:solidFill>
+                  <a:schemeClr val="tx1"/>
+                </a:solidFill>
+                <a:effectLst/>
+                <a:latin typeface="+mn-lt"/>
+                <a:ea typeface="+mn-ea"/>
+                <a:cs typeface="+mn-cs"/>
+              </a:rPr>
+              <a:t>Another common method is </a:t>
+            </a:r>
+            <a:r>
+              <a:rPr lang="en-IE" sz="1200" b="1" i="0" kern="1200" dirty="0">
+                <a:solidFill>
+                  <a:schemeClr val="tx1"/>
+                </a:solidFill>
+                <a:effectLst/>
+                <a:latin typeface="+mn-lt"/>
+                <a:ea typeface="+mn-ea"/>
+                <a:cs typeface="+mn-cs"/>
+              </a:rPr>
+              <a:t>evasion</a:t>
+            </a:r>
+            <a:r>
+              <a:rPr lang="en-IE" sz="1200" b="0" i="0" kern="1200" dirty="0">
+                <a:solidFill>
+                  <a:schemeClr val="tx1"/>
+                </a:solidFill>
+                <a:effectLst/>
+                <a:latin typeface="+mn-lt"/>
+                <a:ea typeface="+mn-ea"/>
+                <a:cs typeface="+mn-cs"/>
+              </a:rPr>
+              <a:t>, where content is designed specifically to avoid detection. This could include rewording messages, changing style, or hiding signals that models rely on.</a:t>
+            </a:r>
+          </a:p>
+          <a:p>
+            <a:r>
+              <a:rPr lang="en-IE" sz="1200" b="0" i="0" kern="1200" dirty="0">
+                <a:solidFill>
+                  <a:schemeClr val="tx1"/>
+                </a:solidFill>
+                <a:effectLst/>
+                <a:latin typeface="+mn-lt"/>
+                <a:ea typeface="+mn-ea"/>
+                <a:cs typeface="+mn-cs"/>
+              </a:rPr>
+              <a:t>There is also a risk that attackers can learn how detection systems work by testing them, and then create content that avoids being flagged.</a:t>
+            </a:r>
+          </a:p>
+          <a:p>
+            <a:r>
+              <a:rPr lang="en-IE" sz="1200" b="0" i="0" kern="1200" dirty="0">
+                <a:solidFill>
+                  <a:schemeClr val="tx1"/>
+                </a:solidFill>
+                <a:effectLst/>
+                <a:latin typeface="+mn-lt"/>
+                <a:ea typeface="+mn-ea"/>
+                <a:cs typeface="+mn-cs"/>
+              </a:rPr>
+              <a:t>Reinforcement learning systems can also be affected. Research shows that these systems can be sensitive to manipulated inputs, which is a concern if they are used in decision-making.</a:t>
+            </a:r>
+          </a:p>
+          <a:p>
+            <a:r>
+              <a:rPr lang="en-IE" sz="1200" b="0" i="0" kern="1200" dirty="0">
+                <a:solidFill>
+                  <a:schemeClr val="tx1"/>
+                </a:solidFill>
+                <a:effectLst/>
+                <a:latin typeface="+mn-lt"/>
+                <a:ea typeface="+mn-ea"/>
+                <a:cs typeface="+mn-cs"/>
+              </a:rPr>
+              <a:t>Because of these risks, detection systems need to be designed carefully. They should be retrained regularly, tested against new and adversarial data, and monitored for changes over time.</a:t>
+            </a:r>
+          </a:p>
+          <a:p>
+            <a:r>
+              <a:rPr lang="en-IE" sz="1200" b="0" i="0" kern="1200" dirty="0">
+                <a:solidFill>
+                  <a:schemeClr val="tx1"/>
+                </a:solidFill>
+                <a:effectLst/>
+                <a:latin typeface="+mn-lt"/>
+                <a:ea typeface="+mn-ea"/>
+                <a:cs typeface="+mn-cs"/>
+              </a:rPr>
+              <a:t>Another important factor is explainability. Human analysts need to understand why a model has flagged something, especially when decisions have political or social consequences.</a:t>
+            </a:r>
+          </a:p>
+          <a:p>
+            <a:r>
+              <a:rPr lang="en-IE" sz="1200" b="0" i="0" kern="1200" dirty="0">
+                <a:solidFill>
+                  <a:schemeClr val="tx1"/>
+                </a:solidFill>
+                <a:effectLst/>
+                <a:latin typeface="+mn-lt"/>
+                <a:ea typeface="+mn-ea"/>
+                <a:cs typeface="+mn-cs"/>
+              </a:rPr>
+              <a:t>In conclusion, machine learning is an important tool in the information war, but it does not solve the problem. Its main value is in helping humans make better decisions and manage large volumes of data. The most effective approach is to use machine learning as part of a wider system that combines technology, human judgement, and ongoing adaptation.</a:t>
+            </a:r>
+          </a:p>
+          <a:p>
+            <a:endParaRPr lang="en-US" dirty="0"/>
+          </a:p>
+        </p:txBody>
+      </p:sp>
+      <p:sp>
+        <p:nvSpPr>
+          <p:cNvPr id="4" name="Slide Number Placeholder 3"/>
+          <p:cNvSpPr>
+            <a:spLocks noGrp="1"/>
+          </p:cNvSpPr>
+          <p:nvPr>
+            <p:ph type="sldNum" sz="quarter" idx="5"/>
+          </p:nvPr>
+        </p:nvSpPr>
+        <p:spPr/>
+        <p:txBody>
+          <a:bodyPr/>
+          <a:lstStyle/>
+          <a:p>
+            <a:fld id="{07F883B1-E8A6-4C4A-97E5-098F35C7FC1D}" type="slidenum">
+              <a:rPr lang="en-US" smtClean="0"/>
+              <a:t>3</a:t>
+            </a:fld>
+            <a:endParaRPr lang="en-US"/>
+          </a:p>
+        </p:txBody>
+      </p:sp>
+    </p:spTree>
+    <p:extLst>
+      <p:ext uri="{BB962C8B-B14F-4D97-AF65-F5344CB8AC3E}">
+        <p14:creationId xmlns:p14="http://schemas.microsoft.com/office/powerpoint/2010/main" val="1191666404"/>
+      </p:ext>
+    </p:extLst>
+  </p:cSld>
+  <p:clrMapOvr>
+    <a:masterClrMapping/>
+  </p:clrMapOvr>
+</p:notes>
 </file>
 
 <file path=ppt/slideLayouts/slideLayout1.xml><?xml version="1.0" encoding="utf-8"?>
@@ -259,7 +1331,7 @@
             <a:fld id="{5923F103-BC34-4FE4-A40E-EDDEECFDA5D0}" type="datetimeFigureOut">
               <a:rPr lang="en-US" smtClean="0"/>
               <a:pPr/>
-              <a:t>4/28/26</a:t>
+              <a:t>4/29/26</a:t>
             </a:fld>
             <a:endParaRPr lang="en-US" dirty="0"/>
           </a:p>
@@ -460,7 +1532,7 @@
           <a:p>
             <a:fld id="{53086D93-FCAC-47E0-A2EE-787E62CA814C}" type="datetimeFigureOut">
               <a:rPr lang="en-US" smtClean="0"/>
-              <a:t>4/28/26</a:t>
+              <a:t>4/29/26</a:t>
             </a:fld>
             <a:endParaRPr lang="en-US" dirty="0"/>
           </a:p>
@@ -671,7 +1743,7 @@
           <a:p>
             <a:fld id="{CDA879A6-0FD0-4734-A311-86BFCA472E6E}" type="datetimeFigureOut">
               <a:rPr lang="en-US" smtClean="0"/>
-              <a:t>4/28/26</a:t>
+              <a:t>4/29/26</a:t>
             </a:fld>
             <a:endParaRPr lang="en-US" dirty="0"/>
           </a:p>
@@ -872,7 +1944,7 @@
           <a:p>
             <a:fld id="{19C9CA7B-DFD4-44B5-8C60-D14B8CD1FB59}" type="datetimeFigureOut">
               <a:rPr lang="en-US" smtClean="0"/>
-              <a:t>4/28/26</a:t>
+              <a:t>4/29/26</a:t>
             </a:fld>
             <a:endParaRPr lang="en-US" dirty="0"/>
           </a:p>
@@ -1149,7 +2221,7 @@
           <a:p>
             <a:fld id="{F34E6425-0181-43F2-84FC-787E803FD2F8}" type="datetimeFigureOut">
               <a:rPr lang="en-US" smtClean="0"/>
-              <a:t>4/28/26</a:t>
+              <a:t>4/29/26</a:t>
             </a:fld>
             <a:endParaRPr lang="en-US" dirty="0"/>
           </a:p>
@@ -1418,7 +2490,7 @@
           <a:p>
             <a:fld id="{3BDB8791-F1B0-41E7-B7FD-A781E65C4266}" type="datetimeFigureOut">
               <a:rPr lang="en-US" smtClean="0"/>
-              <a:t>4/28/26</a:t>
+              <a:t>4/29/26</a:t>
             </a:fld>
             <a:endParaRPr lang="en-US" dirty="0"/>
           </a:p>
@@ -1834,7 +2906,7 @@
           <a:p>
             <a:fld id="{2BE451C3-0FF4-47C4-B829-773ADF60F88C}" type="datetimeFigureOut">
               <a:rPr lang="en-US" smtClean="0"/>
-              <a:t>4/28/26</a:t>
+              <a:t>4/29/26</a:t>
             </a:fld>
             <a:endParaRPr lang="en-US" dirty="0"/>
           </a:p>
@@ -1978,7 +3050,7 @@
           <a:p>
             <a:fld id="{7AA18ACC-A947-437B-A130-35BD54FDF1E9}" type="datetimeFigureOut">
               <a:rPr lang="en-US" smtClean="0"/>
-              <a:t>4/28/26</a:t>
+              <a:t>4/29/26</a:t>
             </a:fld>
             <a:endParaRPr lang="en-US" dirty="0"/>
           </a:p>
@@ -2092,7 +3164,7 @@
           <a:p>
             <a:fld id="{7C8D7E02-BCB8-4D50-A234-369438C08659}" type="datetimeFigureOut">
               <a:rPr lang="en-US" smtClean="0"/>
-              <a:t>4/28/26</a:t>
+              <a:t>4/29/26</a:t>
             </a:fld>
             <a:endParaRPr lang="en-US" dirty="0"/>
           </a:p>
@@ -2406,7 +3478,7 @@
           <a:p>
             <a:fld id="{76E86A4C-8E40-4F87-A4F0-01A0687C5742}" type="datetimeFigureOut">
               <a:rPr lang="en-US" smtClean="0"/>
-              <a:t>4/28/26</a:t>
+              <a:t>4/29/26</a:t>
             </a:fld>
             <a:endParaRPr lang="en-US" dirty="0"/>
           </a:p>
@@ -2696,7 +3768,7 @@
           <a:p>
             <a:fld id="{35E72C73-2D91-4E12-BA25-F0AA0C03599B}" type="datetimeFigureOut">
               <a:rPr lang="en-US" smtClean="0"/>
-              <a:t>4/28/26</a:t>
+              <a:t>4/29/26</a:t>
             </a:fld>
             <a:endParaRPr lang="en-US" dirty="0"/>
           </a:p>
@@ -2940,7 +4012,7 @@
           <a:p>
             <a:fld id="{2BE451C3-0FF4-47C4-B829-773ADF60F88C}" type="datetimeFigureOut">
               <a:rPr lang="en-US" smtClean="0"/>
-              <a:t>4/28/26</a:t>
+              <a:t>4/29/26</a:t>
             </a:fld>
             <a:endParaRPr lang="en-US" dirty="0"/>
           </a:p>
@@ -3562,7 +4634,7 @@
           <p:nvPr/>
         </p:nvPicPr>
         <p:blipFill>
-          <a:blip r:embed="rId2"/>
+          <a:blip r:embed="rId3"/>
           <a:stretch>
             <a:fillRect/>
           </a:stretch>
@@ -3604,7 +4676,7 @@
           <p:nvPr/>
         </p:nvPicPr>
         <p:blipFill>
-          <a:blip r:embed="rId3"/>
+          <a:blip r:embed="rId4"/>
           <a:stretch>
             <a:fillRect/>
           </a:stretch>
@@ -3662,7 +4734,10 @@
             <a:r>
               <a:rPr lang="en-US" sz="1000" dirty="0">
                 <a:solidFill>
-                  <a:schemeClr val="accent2"/>
+                  <a:schemeClr val="tx1">
+                    <a:lumMod val="50000"/>
+                    <a:lumOff val="50000"/>
+                  </a:schemeClr>
                 </a:solidFill>
               </a:rPr>
               <a:t>1. Singer,  P.W. and  Brooking, E. T. ( 2018)  *</a:t>
@@ -3670,7 +4745,10 @@
             <a:r>
               <a:rPr lang="en-US" sz="1000" dirty="0" err="1">
                 <a:solidFill>
-                  <a:schemeClr val="accent2"/>
+                  <a:schemeClr val="tx1">
+                    <a:lumMod val="50000"/>
+                    <a:lumOff val="50000"/>
+                  </a:schemeClr>
                 </a:solidFill>
               </a:rPr>
               <a:t>LikeWar</a:t>
@@ -3678,7 +4756,10 @@
             <a:r>
               <a:rPr lang="en-US" sz="1000" dirty="0">
                 <a:solidFill>
-                  <a:schemeClr val="accent2"/>
+                  <a:schemeClr val="tx1">
+                    <a:lumMod val="50000"/>
+                    <a:lumOff val="50000"/>
+                  </a:schemeClr>
                 </a:solidFill>
               </a:rPr>
               <a:t>: T he Weaponization of  Social  Med </a:t>
@@ -3686,7 +4767,10 @@
             <a:r>
               <a:rPr lang="en-US" sz="1000" dirty="0" err="1">
                 <a:solidFill>
-                  <a:schemeClr val="accent2"/>
+                  <a:schemeClr val="tx1">
+                    <a:lumMod val="50000"/>
+                    <a:lumOff val="50000"/>
+                  </a:schemeClr>
                 </a:solidFill>
               </a:rPr>
               <a:t>ia</a:t>
@@ -3694,7 +4778,10 @@
             <a:r>
               <a:rPr lang="en-US" sz="1000" dirty="0">
                 <a:solidFill>
-                  <a:schemeClr val="accent2"/>
+                  <a:schemeClr val="tx1">
+                    <a:lumMod val="50000"/>
+                    <a:lumOff val="50000"/>
+                  </a:schemeClr>
                 </a:solidFill>
               </a:rPr>
               <a:t>*.  </a:t>
@@ -3702,7 +4789,10 @@
             <a:r>
               <a:rPr lang="en-US" sz="1000" dirty="0" err="1">
                 <a:solidFill>
-                  <a:schemeClr val="accent2"/>
+                  <a:schemeClr val="tx1">
+                    <a:lumMod val="50000"/>
+                    <a:lumOff val="50000"/>
+                  </a:schemeClr>
                 </a:solidFill>
               </a:rPr>
               <a:t>Bosto</a:t>
@@ -3710,7 +4800,10 @@
             <a:r>
               <a:rPr lang="en-US" sz="1000" dirty="0">
                 <a:solidFill>
-                  <a:schemeClr val="accent2"/>
+                  <a:schemeClr val="tx1">
+                    <a:lumMod val="50000"/>
+                    <a:lumOff val="50000"/>
+                  </a:schemeClr>
                 </a:solidFill>
               </a:rPr>
               <a:t> n, MA:  Houghton Mifflin Harcourt.</a:t>
@@ -3891,15 +4984,15 @@
           <p:nvPr/>
         </p:nvPicPr>
         <p:blipFill>
-          <a:blip r:embed="rId2"/>
+          <a:blip r:embed="rId3"/>
           <a:stretch>
             <a:fillRect/>
           </a:stretch>
         </p:blipFill>
         <p:spPr>
           <a:xfrm>
-            <a:off x="-776696" y="1791698"/>
-            <a:ext cx="2393461" cy="3947997"/>
+            <a:off x="-576999" y="1693284"/>
+            <a:ext cx="1953854" cy="3873375"/>
           </a:xfrm>
           <a:prstGeom prst="rect">
             <a:avLst/>
@@ -3920,7 +5013,7 @@
         </p:nvSpPr>
         <p:spPr>
           <a:xfrm>
-            <a:off x="0" y="6163765"/>
+            <a:off x="0" y="6174275"/>
             <a:ext cx="12192000" cy="861774"/>
           </a:xfrm>
           <a:prstGeom prst="rect">
@@ -3937,7 +5030,10 @@
             <a:r>
               <a:rPr lang="en-US" sz="1000" dirty="0">
                 <a:solidFill>
-                  <a:schemeClr val="accent2"/>
+                  <a:schemeClr val="tx1">
+                    <a:lumMod val="50000"/>
+                    <a:lumOff val="50000"/>
+                  </a:schemeClr>
                 </a:solidFill>
               </a:rPr>
               <a:t>2. Dabholkar, S. et al. (2024) ‘Adversarial attacks on reinforcement learning agents for command and control’. Add final journal, volume, issue and page details from publisher record before submission.</a:t>
@@ -3947,7 +5043,10 @@
             <a:r>
               <a:rPr lang="en-US" sz="1000" dirty="0">
                 <a:solidFill>
-                  <a:schemeClr val="accent2"/>
+                  <a:schemeClr val="tx1">
+                    <a:lumMod val="50000"/>
+                    <a:lumOff val="50000"/>
+                  </a:schemeClr>
                 </a:solidFill>
               </a:rPr>
               <a:t>3. </a:t>
@@ -3955,7 +5054,10 @@
             <a:r>
               <a:rPr lang="en-US" sz="1000" dirty="0" err="1">
                 <a:solidFill>
-                  <a:schemeClr val="accent2"/>
+                  <a:schemeClr val="tx1">
+                    <a:lumMod val="50000"/>
+                    <a:lumOff val="50000"/>
+                  </a:schemeClr>
                 </a:solidFill>
               </a:rPr>
               <a:t>Duddu</a:t>
@@ -3963,7 +5065,10 @@
             <a:r>
               <a:rPr lang="en-US" sz="1000" dirty="0">
                 <a:solidFill>
-                  <a:schemeClr val="accent2"/>
+                  <a:schemeClr val="tx1">
+                    <a:lumMod val="50000"/>
+                    <a:lumOff val="50000"/>
+                  </a:schemeClr>
                 </a:solidFill>
               </a:rPr>
               <a:t>, V. (2018) ‘A Survey of Adversarial Machine Learning in Cyber Warfare’, *</a:t>
@@ -3971,7 +5076,10 @@
             <a:r>
               <a:rPr lang="en-US" sz="1000" dirty="0" err="1">
                 <a:solidFill>
-                  <a:schemeClr val="accent2"/>
+                  <a:schemeClr val="tx1">
+                    <a:lumMod val="50000"/>
+                    <a:lumOff val="50000"/>
+                  </a:schemeClr>
                 </a:solidFill>
               </a:rPr>
               <a:t>Defence</a:t>
@@ -3979,7 +5087,10 @@
             <a:r>
               <a:rPr lang="en-US" sz="1000" dirty="0">
                 <a:solidFill>
-                  <a:schemeClr val="accent2"/>
+                  <a:schemeClr val="tx1">
+                    <a:lumMod val="50000"/>
+                    <a:lumOff val="50000"/>
+                  </a:schemeClr>
                 </a:solidFill>
               </a:rPr>
               <a:t> Science Journal*, 68(4), pp. 356–366. </a:t>
@@ -3987,7 +5098,10 @@
             <a:r>
               <a:rPr lang="en-US" sz="1000" dirty="0" err="1">
                 <a:solidFill>
-                  <a:schemeClr val="accent2"/>
+                  <a:schemeClr val="tx1">
+                    <a:lumMod val="50000"/>
+                    <a:lumOff val="50000"/>
+                  </a:schemeClr>
                 </a:solidFill>
               </a:rPr>
               <a:t>doi</a:t>
@@ -3995,7 +5109,10 @@
             <a:r>
               <a:rPr lang="en-US" sz="1000" dirty="0">
                 <a:solidFill>
-                  <a:schemeClr val="accent2"/>
+                  <a:schemeClr val="tx1">
+                    <a:lumMod val="50000"/>
+                    <a:lumOff val="50000"/>
+                  </a:schemeClr>
                 </a:solidFill>
               </a:rPr>
               <a:t>: 10.14429/dsj.68.12731.</a:t>
@@ -4005,7 +5122,10 @@
             <a:r>
               <a:rPr lang="en-US" sz="1000" dirty="0">
                 <a:solidFill>
-                  <a:schemeClr val="accent2"/>
+                  <a:schemeClr val="tx1">
+                    <a:lumMod val="50000"/>
+                    <a:lumOff val="50000"/>
+                  </a:schemeClr>
                 </a:solidFill>
               </a:rPr>
               <a:t>4. Sadiq, S., </a:t>
@@ -4013,7 +5133,10 @@
             <a:r>
               <a:rPr lang="en-US" sz="1000" dirty="0" err="1">
                 <a:solidFill>
-                  <a:schemeClr val="accent2"/>
+                  <a:schemeClr val="tx1">
+                    <a:lumMod val="50000"/>
+                    <a:lumOff val="50000"/>
+                  </a:schemeClr>
                 </a:solidFill>
               </a:rPr>
               <a:t>Aljrees</a:t>
@@ -4021,7 +5144,10 @@
             <a:r>
               <a:rPr lang="en-US" sz="1000" dirty="0">
                 <a:solidFill>
-                  <a:schemeClr val="accent2"/>
+                  <a:schemeClr val="tx1">
+                    <a:lumMod val="50000"/>
+                    <a:lumOff val="50000"/>
+                  </a:schemeClr>
                 </a:solidFill>
               </a:rPr>
               <a:t>, T. and Ullah, S. (2023) ‘Deepfake Detection on Social Media: Leveraging Deep Learning and </a:t>
@@ -4029,7 +5155,10 @@
             <a:r>
               <a:rPr lang="en-US" sz="1000" dirty="0" err="1">
                 <a:solidFill>
-                  <a:schemeClr val="accent2"/>
+                  <a:schemeClr val="tx1">
+                    <a:lumMod val="50000"/>
+                    <a:lumOff val="50000"/>
+                  </a:schemeClr>
                 </a:solidFill>
               </a:rPr>
               <a:t>FastText</a:t>
@@ -4037,7 +5166,10 @@
             <a:r>
               <a:rPr lang="en-US" sz="1000" dirty="0">
                 <a:solidFill>
-                  <a:schemeClr val="accent2"/>
+                  <a:schemeClr val="tx1">
+                    <a:lumMod val="50000"/>
+                    <a:lumOff val="50000"/>
+                  </a:schemeClr>
                 </a:solidFill>
               </a:rPr>
               <a:t> Embeddings for Identifying Machine-Generated Tweets’, *IEEE Access*. </a:t>
@@ -4045,7 +5177,10 @@
             <a:r>
               <a:rPr lang="en-US" sz="1000" dirty="0" err="1">
                 <a:solidFill>
-                  <a:schemeClr val="accent2"/>
+                  <a:schemeClr val="tx1">
+                    <a:lumMod val="50000"/>
+                    <a:lumOff val="50000"/>
+                  </a:schemeClr>
                 </a:solidFill>
               </a:rPr>
               <a:t>doi</a:t>
@@ -4053,7 +5188,10 @@
             <a:r>
               <a:rPr lang="en-US" sz="1000" dirty="0">
                 <a:solidFill>
-                  <a:schemeClr val="accent2"/>
+                  <a:schemeClr val="tx1">
+                    <a:lumMod val="50000"/>
+                    <a:lumOff val="50000"/>
+                  </a:schemeClr>
                 </a:solidFill>
               </a:rPr>
               <a:t>: 10.1109/ACCESS.2023.3308515.</a:t>
@@ -4062,7 +5200,10 @@
           <a:p>
             <a:endParaRPr lang="en-US" sz="1000" dirty="0">
               <a:solidFill>
-                <a:schemeClr val="accent2"/>
+                <a:schemeClr val="tx1">
+                  <a:lumMod val="50000"/>
+                  <a:lumOff val="50000"/>
+                </a:schemeClr>
               </a:solidFill>
             </a:endParaRPr>
           </a:p>
@@ -4083,14 +5224,14 @@
           <p:nvPr>
             <p:extLst>
               <p:ext uri="{D42A27DB-BD31-4B8C-83A1-F6EECF244321}">
-                <p14:modId xmlns:p14="http://schemas.microsoft.com/office/powerpoint/2010/main" val="2296255442"/>
+                <p14:modId xmlns:p14="http://schemas.microsoft.com/office/powerpoint/2010/main" val="55382127"/>
               </p:ext>
             </p:extLst>
           </p:nvPr>
         </p:nvGraphicFramePr>
         <p:xfrm>
           <a:off x="891207" y="1520249"/>
-          <a:ext cx="11058250" cy="3566160"/>
+          <a:ext cx="11058250" cy="3383280"/>
         </p:xfrm>
         <a:graphic>
           <a:graphicData uri="http://schemas.openxmlformats.org/drawingml/2006/table">
@@ -4120,14 +5261,14 @@
                     </a:ext>
                   </a:extLst>
                 </a:gridCol>
-                <a:gridCol w="2127437">
+                <a:gridCol w="2201423">
                   <a:extLst>
                     <a:ext uri="{9D8B030D-6E8A-4147-A177-3AD203B41FA5}">
                       <a16:colId xmlns:a16="http://schemas.microsoft.com/office/drawing/2014/main" val="3278855723"/>
                     </a:ext>
                   </a:extLst>
                 </a:gridCol>
-                <a:gridCol w="2606174">
+                <a:gridCol w="2532188">
                   <a:extLst>
                     <a:ext uri="{9D8B030D-6E8A-4147-A177-3AD203B41FA5}">
                       <a16:colId xmlns:a16="http://schemas.microsoft.com/office/drawing/2014/main" val="1337209815"/>
@@ -4452,7 +5593,7 @@
                           </a:solidFill>
                           <a:effectLst/>
                         </a:rPr>
-                        <a:t>Word patterns, semantic vectors</a:t>
+                        <a:t>Word usage patterns, syntax, semantic vectors</a:t>
                       </a:r>
                       <a:endParaRPr lang="en-US" sz="1200" b="0" kern="1200" dirty="0">
                         <a:solidFill>
@@ -4496,7 +5637,7 @@
                           </a:solidFill>
                           <a:effectLst/>
                         </a:rPr>
-                        <a:t>Strong benchmark detection of generated tweets</a:t>
+                        <a:t>Learns linguistic patterns at scale and detects generated content with high accuracy in controlled datasets</a:t>
                       </a:r>
                       <a:endParaRPr lang="en-US" sz="1200" b="0" kern="1200" dirty="0">
                         <a:solidFill>
@@ -4523,7 +5664,7 @@
                           </a:solidFill>
                           <a:effectLst/>
                         </a:rPr>
-                        <a:t>Text methods are fast and accurate on known datasets, but attackers can adapt language models to reduce performance.</a:t>
+                        <a:t>Breaks under domain shift – attackers can rephrase, change style, or use new models to evade detection</a:t>
                       </a:r>
                       <a:endParaRPr lang="en-IE" sz="1200" b="0" kern="1200" dirty="0">
                         <a:solidFill>
@@ -4662,7 +5803,7 @@
                           </a:solidFill>
                           <a:effectLst/>
                         </a:rPr>
-                        <a:t>Retweet networks, temporal activity, account interactions</a:t>
+                        <a:t>Network connections, interaction patterns, timing of activity</a:t>
                       </a:r>
                       <a:endParaRPr lang="en-US" sz="1200" b="0" kern="1200" dirty="0">
                         <a:solidFill>
@@ -4706,7 +5847,7 @@
                           </a:solidFill>
                           <a:effectLst/>
                         </a:rPr>
-                        <a:t>Retweet networks, temporal activity, account interactions</a:t>
+                        <a:t>Identifies coordination patterns across accounts, which are harder to fake than individual content</a:t>
                       </a:r>
                       <a:endParaRPr lang="en-US" sz="1200" b="0" kern="1200" dirty="0">
                         <a:solidFill>
@@ -4733,7 +5874,7 @@
                           </a:solidFill>
                           <a:effectLst/>
                         </a:rPr>
-                        <a:t>Graph methods are often more robust because they detect coordination patterns rather than only the text itself</a:t>
+                        <a:t>Less effective against slow, low-volume, or cross-platform coordination with limited visibility</a:t>
                       </a:r>
                       <a:endParaRPr lang="en-IE" sz="1200" b="0" kern="1200" dirty="0">
                         <a:solidFill>
@@ -4884,7 +6025,7 @@
                           </a:solidFill>
                           <a:effectLst/>
                         </a:rPr>
-                        <a:t>Frequency artefacts, visual inconsistencies</a:t>
+                        <a:t>Visual artefacts, frequency inconsistencies, audio-visual mismatch</a:t>
                       </a:r>
                       <a:endParaRPr lang="en-US" sz="1200" dirty="0"/>
                     </a:p>
@@ -4920,7 +6061,7 @@
                           </a:solidFill>
                           <a:effectLst/>
                         </a:rPr>
-                        <a:t>Learns machine-generated patterns </a:t>
+                        <a:t>Detects visual/audio artefacts and inconsistencies in generated media</a:t>
                       </a:r>
                       <a:endParaRPr lang="en-US" sz="1200" dirty="0"/>
                     </a:p>
@@ -4951,7 +6092,7 @@
                       </a:pPr>
                       <a:r>
                         <a:rPr lang="en-US" sz="1200" dirty="0"/>
-                        <a:t>Synthetic media detection is an arms race because generative models evolve faster than static forensic cues</a:t>
+                        <a:t>Arms race – improvements in generative models remove detectable artefacts over time</a:t>
                       </a:r>
                     </a:p>
                   </a:txBody>
@@ -5137,7 +6278,7 @@
                           </a:solidFill>
                           <a:effectLst/>
                         </a:rPr>
-                        <a:t>Text, metadata, network signals</a:t>
+                        <a:t>Combined signals: text, metadata, behaviour, network context</a:t>
                       </a:r>
                       <a:endParaRPr lang="en-US" sz="1200" dirty="0"/>
                     </a:p>
@@ -5173,7 +6314,7 @@
                           </a:solidFill>
                           <a:effectLst/>
                         </a:rPr>
-                        <a:t>Highlights operational realism</a:t>
+                        <a:t>Combines multiple signals and supports analysts in prioritising threats at scale</a:t>
                       </a:r>
                       <a:endParaRPr lang="en-US" sz="1200" dirty="0"/>
                     </a:p>
@@ -5209,24 +6350,7 @@
                           </a:solidFill>
                           <a:effectLst/>
                         </a:rPr>
-                        <a:t>Adversaries adapt to detectors.</a:t>
-                      </a:r>
-                      <a:br>
-                        <a:rPr lang="en-IE" sz="1200" b="0" kern="1200" dirty="0">
-                          <a:solidFill>
-                            <a:schemeClr val="dk1"/>
-                          </a:solidFill>
-                          <a:effectLst/>
-                        </a:rPr>
-                      </a:br>
-                      <a:r>
-                        <a:rPr lang="en-IE" sz="1200" b="0" kern="1200" dirty="0">
-                          <a:solidFill>
-                            <a:schemeClr val="dk1"/>
-                          </a:solidFill>
-                          <a:effectLst/>
-                        </a:rPr>
-                        <a:t>Operational systems work best as triage tools for analysts rather than fully autonomous decision-makers. </a:t>
+                        <a:t>Cannot operate reliably as a fully automated system due to false positives and adversarial adaptation</a:t>
                       </a:r>
                       <a:endParaRPr lang="en-US" sz="1200" dirty="0"/>
                     </a:p>
@@ -5493,7 +6617,7 @@
           <p:nvPr/>
         </p:nvPicPr>
         <p:blipFill>
-          <a:blip r:embed="rId2"/>
+          <a:blip r:embed="rId3"/>
           <a:stretch>
             <a:fillRect/>
           </a:stretch>
@@ -5927,6 +7051,321 @@
 </a:theme>
 </file>
 
+<file path=ppt/theme/theme2.xml><?xml version="1.0" encoding="utf-8"?>
+<a:theme xmlns:a="http://schemas.openxmlformats.org/drawingml/2006/main" name="Office Theme">
+  <a:themeElements>
+    <a:clrScheme name="Office">
+      <a:dk1>
+        <a:sysClr val="windowText" lastClr="000000"/>
+      </a:dk1>
+      <a:lt1>
+        <a:sysClr val="window" lastClr="FFFFFF"/>
+      </a:lt1>
+      <a:dk2>
+        <a:srgbClr val="0E2841"/>
+      </a:dk2>
+      <a:lt2>
+        <a:srgbClr val="E8E8E8"/>
+      </a:lt2>
+      <a:accent1>
+        <a:srgbClr val="156082"/>
+      </a:accent1>
+      <a:accent2>
+        <a:srgbClr val="E97132"/>
+      </a:accent2>
+      <a:accent3>
+        <a:srgbClr val="196B24"/>
+      </a:accent3>
+      <a:accent4>
+        <a:srgbClr val="0F9ED5"/>
+      </a:accent4>
+      <a:accent5>
+        <a:srgbClr val="A02B93"/>
+      </a:accent5>
+      <a:accent6>
+        <a:srgbClr val="4EA72E"/>
+      </a:accent6>
+      <a:hlink>
+        <a:srgbClr val="467886"/>
+      </a:hlink>
+      <a:folHlink>
+        <a:srgbClr val="96607D"/>
+      </a:folHlink>
+    </a:clrScheme>
+    <a:fontScheme name="Office">
+      <a:majorFont>
+        <a:latin typeface="Aptos Display" panose="02110004020202020204"/>
+        <a:ea typeface=""/>
+        <a:cs typeface=""/>
+        <a:font script="Jpan" typeface="游ゴシック Light"/>
+        <a:font script="Hang" typeface="맑은 고딕"/>
+        <a:font script="Hans" typeface="等线 Light"/>
+        <a:font script="Hant" typeface="新細明體"/>
+        <a:font script="Arab" typeface="Times New Roman"/>
+        <a:font script="Hebr" typeface="Times New Roman"/>
+        <a:font script="Thai" typeface="Angsana New"/>
+        <a:font script="Ethi" typeface="Nyala"/>
+        <a:font script="Beng" typeface="Vrinda"/>
+        <a:font script="Gujr" typeface="Shruti"/>
+        <a:font script="Khmr" typeface="MoolBoran"/>
+        <a:font script="Knda" typeface="Tunga"/>
+        <a:font script="Guru" typeface="Raavi"/>
+        <a:font script="Cans" typeface="Euphemia"/>
+        <a:font script="Cher" typeface="Plantagenet Cherokee"/>
+        <a:font script="Yiii" typeface="Microsoft Yi Baiti"/>
+        <a:font script="Tibt" typeface="Microsoft Himalaya"/>
+        <a:font script="Thaa" typeface="MV Boli"/>
+        <a:font script="Deva" typeface="Mangal"/>
+        <a:font script="Telu" typeface="Gautami"/>
+        <a:font script="Taml" typeface="Latha"/>
+        <a:font script="Syrc" typeface="Estrangelo Edessa"/>
+        <a:font script="Orya" typeface="Kalinga"/>
+        <a:font script="Mlym" typeface="Kartika"/>
+        <a:font script="Laoo" typeface="DokChampa"/>
+        <a:font script="Sinh" typeface="Iskoola Pota"/>
+        <a:font script="Mong" typeface="Mongolian Baiti"/>
+        <a:font script="Viet" typeface="Times New Roman"/>
+        <a:font script="Uigh" typeface="Microsoft Uighur"/>
+        <a:font script="Geor" typeface="Sylfaen"/>
+        <a:font script="Armn" typeface="Arial"/>
+        <a:font script="Bugi" typeface="Leelawadee UI"/>
+        <a:font script="Bopo" typeface="Microsoft JhengHei"/>
+        <a:font script="Java" typeface="Javanese Text"/>
+        <a:font script="Lisu" typeface="Segoe UI"/>
+        <a:font script="Mymr" typeface="Myanmar Text"/>
+        <a:font script="Nkoo" typeface="Ebrima"/>
+        <a:font script="Olck" typeface="Nirmala UI"/>
+        <a:font script="Osma" typeface="Ebrima"/>
+        <a:font script="Phag" typeface="Phagspa"/>
+        <a:font script="Syrn" typeface="Estrangelo Edessa"/>
+        <a:font script="Syrj" typeface="Estrangelo Edessa"/>
+        <a:font script="Syre" typeface="Estrangelo Edessa"/>
+        <a:font script="Sora" typeface="Nirmala UI"/>
+        <a:font script="Tale" typeface="Microsoft Tai Le"/>
+        <a:font script="Talu" typeface="Microsoft New Tai Lue"/>
+        <a:font script="Tfng" typeface="Ebrima"/>
+      </a:majorFont>
+      <a:minorFont>
+        <a:latin typeface="Aptos" panose="02110004020202020204"/>
+        <a:ea typeface=""/>
+        <a:cs typeface=""/>
+        <a:font script="Jpan" typeface="游ゴシック"/>
+        <a:font script="Hang" typeface="맑은 고딕"/>
+        <a:font script="Hans" typeface="等线"/>
+        <a:font script="Hant" typeface="新細明體"/>
+        <a:font script="Arab" typeface="Arial"/>
+        <a:font script="Hebr" typeface="Arial"/>
+        <a:font script="Thai" typeface="Cordia New"/>
+        <a:font script="Ethi" typeface="Nyala"/>
+        <a:font script="Beng" typeface="Vrinda"/>
+        <a:font script="Gujr" typeface="Shruti"/>
+        <a:font script="Khmr" typeface="DaunPenh"/>
+        <a:font script="Knda" typeface="Tunga"/>
+        <a:font script="Guru" typeface="Raavi"/>
+        <a:font script="Cans" typeface="Euphemia"/>
+        <a:font script="Cher" typeface="Plantagenet Cherokee"/>
+        <a:font script="Yiii" typeface="Microsoft Yi Baiti"/>
+        <a:font script="Tibt" typeface="Microsoft Himalaya"/>
+        <a:font script="Thaa" typeface="MV Boli"/>
+        <a:font script="Deva" typeface="Mangal"/>
+        <a:font script="Telu" typeface="Gautami"/>
+        <a:font script="Taml" typeface="Latha"/>
+        <a:font script="Syrc" typeface="Estrangelo Edessa"/>
+        <a:font script="Orya" typeface="Kalinga"/>
+        <a:font script="Mlym" typeface="Kartika"/>
+        <a:font script="Laoo" typeface="DokChampa"/>
+        <a:font script="Sinh" typeface="Iskoola Pota"/>
+        <a:font script="Mong" typeface="Mongolian Baiti"/>
+        <a:font script="Viet" typeface="Arial"/>
+        <a:font script="Uigh" typeface="Microsoft Uighur"/>
+        <a:font script="Geor" typeface="Sylfaen"/>
+        <a:font script="Armn" typeface="Arial"/>
+        <a:font script="Bugi" typeface="Leelawadee UI"/>
+        <a:font script="Bopo" typeface="Microsoft JhengHei"/>
+        <a:font script="Java" typeface="Javanese Text"/>
+        <a:font script="Lisu" typeface="Segoe UI"/>
+        <a:font script="Mymr" typeface="Myanmar Text"/>
+        <a:font script="Nkoo" typeface="Ebrima"/>
+        <a:font script="Olck" typeface="Nirmala UI"/>
+        <a:font script="Osma" typeface="Ebrima"/>
+        <a:font script="Phag" typeface="Phagspa"/>
+        <a:font script="Syrn" typeface="Estrangelo Edessa"/>
+        <a:font script="Syrj" typeface="Estrangelo Edessa"/>
+        <a:font script="Syre" typeface="Estrangelo Edessa"/>
+        <a:font script="Sora" typeface="Nirmala UI"/>
+        <a:font script="Tale" typeface="Microsoft Tai Le"/>
+        <a:font script="Talu" typeface="Microsoft New Tai Lue"/>
+        <a:font script="Tfng" typeface="Ebrima"/>
+      </a:minorFont>
+    </a:fontScheme>
+    <a:fmtScheme name="Office">
+      <a:fillStyleLst>
+        <a:solidFill>
+          <a:schemeClr val="phClr"/>
+        </a:solidFill>
+        <a:gradFill rotWithShape="1">
+          <a:gsLst>
+            <a:gs pos="0">
+              <a:schemeClr val="phClr">
+                <a:lumMod val="110000"/>
+                <a:satMod val="105000"/>
+                <a:tint val="67000"/>
+              </a:schemeClr>
+            </a:gs>
+            <a:gs pos="50000">
+              <a:schemeClr val="phClr">
+                <a:lumMod val="105000"/>
+                <a:satMod val="103000"/>
+                <a:tint val="73000"/>
+              </a:schemeClr>
+            </a:gs>
+            <a:gs pos="100000">
+              <a:schemeClr val="phClr">
+                <a:lumMod val="105000"/>
+                <a:satMod val="109000"/>
+                <a:tint val="81000"/>
+              </a:schemeClr>
+            </a:gs>
+          </a:gsLst>
+          <a:lin ang="5400000" scaled="0"/>
+        </a:gradFill>
+        <a:gradFill rotWithShape="1">
+          <a:gsLst>
+            <a:gs pos="0">
+              <a:schemeClr val="phClr">
+                <a:satMod val="103000"/>
+                <a:lumMod val="102000"/>
+                <a:tint val="94000"/>
+              </a:schemeClr>
+            </a:gs>
+            <a:gs pos="50000">
+              <a:schemeClr val="phClr">
+                <a:satMod val="110000"/>
+                <a:lumMod val="100000"/>
+                <a:shade val="100000"/>
+              </a:schemeClr>
+            </a:gs>
+            <a:gs pos="100000">
+              <a:schemeClr val="phClr">
+                <a:lumMod val="99000"/>
+                <a:satMod val="120000"/>
+                <a:shade val="78000"/>
+              </a:schemeClr>
+            </a:gs>
+          </a:gsLst>
+          <a:lin ang="5400000" scaled="0"/>
+        </a:gradFill>
+      </a:fillStyleLst>
+      <a:lnStyleLst>
+        <a:ln w="12700" cap="flat" cmpd="sng" algn="ctr">
+          <a:solidFill>
+            <a:schemeClr val="phClr"/>
+          </a:solidFill>
+          <a:prstDash val="solid"/>
+          <a:miter lim="800000"/>
+        </a:ln>
+        <a:ln w="19050" cap="flat" cmpd="sng" algn="ctr">
+          <a:solidFill>
+            <a:schemeClr val="phClr"/>
+          </a:solidFill>
+          <a:prstDash val="solid"/>
+          <a:miter lim="800000"/>
+        </a:ln>
+        <a:ln w="25400" cap="flat" cmpd="sng" algn="ctr">
+          <a:solidFill>
+            <a:schemeClr val="phClr"/>
+          </a:solidFill>
+          <a:prstDash val="solid"/>
+          <a:miter lim="800000"/>
+        </a:ln>
+      </a:lnStyleLst>
+      <a:effectStyleLst>
+        <a:effectStyle>
+          <a:effectLst/>
+        </a:effectStyle>
+        <a:effectStyle>
+          <a:effectLst/>
+        </a:effectStyle>
+        <a:effectStyle>
+          <a:effectLst>
+            <a:outerShdw blurRad="57150" dist="19050" dir="5400000" algn="ctr" rotWithShape="0">
+              <a:srgbClr val="000000">
+                <a:alpha val="63000"/>
+              </a:srgbClr>
+            </a:outerShdw>
+          </a:effectLst>
+        </a:effectStyle>
+      </a:effectStyleLst>
+      <a:bgFillStyleLst>
+        <a:solidFill>
+          <a:schemeClr val="phClr"/>
+        </a:solidFill>
+        <a:solidFill>
+          <a:schemeClr val="phClr">
+            <a:tint val="95000"/>
+            <a:satMod val="170000"/>
+          </a:schemeClr>
+        </a:solidFill>
+        <a:gradFill rotWithShape="1">
+          <a:gsLst>
+            <a:gs pos="0">
+              <a:schemeClr val="phClr">
+                <a:tint val="93000"/>
+                <a:satMod val="150000"/>
+                <a:shade val="98000"/>
+                <a:lumMod val="102000"/>
+              </a:schemeClr>
+            </a:gs>
+            <a:gs pos="50000">
+              <a:schemeClr val="phClr">
+                <a:tint val="98000"/>
+                <a:satMod val="130000"/>
+                <a:shade val="90000"/>
+                <a:lumMod val="103000"/>
+              </a:schemeClr>
+            </a:gs>
+            <a:gs pos="100000">
+              <a:schemeClr val="phClr">
+                <a:shade val="63000"/>
+                <a:satMod val="120000"/>
+              </a:schemeClr>
+            </a:gs>
+          </a:gsLst>
+          <a:lin ang="5400000" scaled="0"/>
+        </a:gradFill>
+      </a:bgFillStyleLst>
+    </a:fmtScheme>
+  </a:themeElements>
+  <a:objectDefaults>
+    <a:lnDef>
+      <a:spPr/>
+      <a:bodyPr/>
+      <a:lstStyle/>
+      <a:style>
+        <a:lnRef idx="2">
+          <a:schemeClr val="accent1"/>
+        </a:lnRef>
+        <a:fillRef idx="0">
+          <a:schemeClr val="accent1"/>
+        </a:fillRef>
+        <a:effectRef idx="1">
+          <a:schemeClr val="accent1"/>
+        </a:effectRef>
+        <a:fontRef idx="minor">
+          <a:schemeClr val="tx1"/>
+        </a:fontRef>
+      </a:style>
+    </a:lnDef>
+  </a:objectDefaults>
+  <a:extraClrSchemeLst/>
+  <a:extLst>
+    <a:ext uri="{05A4C25C-085E-4340-85A3-A5531E510DB2}">
+      <thm15:themeFamily xmlns:thm15="http://schemas.microsoft.com/office/thememl/2012/main" name="Office Theme" id="{2E142A2C-CD16-42D6-873A-C26D2A0506FA}" vid="{1BDDFF52-6CD6-40A5-AB3C-68EB2F1E4D0A}"/>
+    </a:ext>
+  </a:extLst>
+</a:theme>
+</file>
+
 <file path=docMetadata/LabelInfo.xml><?xml version="1.0" encoding="utf-8"?>
 <clbl:labelList xmlns:clbl="http://schemas.microsoft.com/office/2020/mipLabelMetadata">
   <clbl:label id="{a46c1e80-1de9-4bab-b8c8-1624be24ed3c}" enabled="1" method="Standard" siteId="{9ceb45d9-8994-49de-a178-bcc598fec3ce}" contentBits="2" removed="0"/>
